--- a/docs/slides/pptx/M5-closing.pptx
+++ b/docs/slides/pptx/M5-closing.pptx
@@ -8897,7 +8897,7 @@
           <a:p>
             <a:r>
               <a:rPr sz="2800"/>
-              <a:t>Sentiment: 7/10 vs 10/10 — only on the hard slice</a:t>
+              <a:t>Sentiment: 7/10 vs 10/10, only on the hard slice</a:t>
             </a:r>
           </a:p>
         </p:txBody>
@@ -8970,7 +8970,7 @@
           <a:p>
             <a:r>
               <a:rPr sz="2800"/>
-              <a:t>Sentiment: 7/10 vs 10/10 — only on the hard slice</a:t>
+              <a:t>Sentiment: 7/10 vs 10/10, only on the hard slice</a:t>
             </a:r>
           </a:p>
           <a:p>
@@ -9049,7 +9049,7 @@
           <a:p>
             <a:r>
               <a:rPr sz="2800"/>
-              <a:t>Sentiment: 7/10 vs 10/10 — only on the hard slice</a:t>
+              <a:t>Sentiment: 7/10 vs 10/10, only on the hard slice</a:t>
             </a:r>
           </a:p>
           <a:p>
@@ -9134,7 +9134,7 @@
           <a:p>
             <a:r>
               <a:rPr sz="2800"/>
-              <a:t>Sentiment: 7/10 vs 10/10 — only on the hard slice</a:t>
+              <a:t>Sentiment: 7/10 vs 10/10, only on the hard slice</a:t>
             </a:r>
           </a:p>
           <a:p>
@@ -9225,7 +9225,7 @@
           <a:p>
             <a:r>
               <a:rPr sz="2800"/>
-              <a:t>Sentiment: 7/10 vs 10/10 — only on the hard slice</a:t>
+              <a:t>Sentiment: 7/10 vs 10/10, only on the hard slice</a:t>
             </a:r>
           </a:p>
           <a:p>
@@ -9798,7 +9798,7 @@
           <a:lstStyle/>
           <a:p>
             <a:r>
-              <a:t>Sort by Cost, Cheapest First</a:t>
+              <a:t>Sort by Difficulty, Easiest First</a:t>
             </a:r>
           </a:p>
         </p:txBody>
@@ -9825,7 +9825,7 @@
           <a:p>
             <a:r>
               <a:rPr sz="2800"/>
-              <a:t>The cheapest marked row = your first AI feature</a:t>
+              <a:t>The easiest marked row = your first AI feature</a:t>
             </a:r>
           </a:p>
         </p:txBody>
@@ -9871,7 +9871,7 @@
           <a:lstStyle/>
           <a:p>
             <a:r>
-              <a:t>Sort by Cost, Cheapest First</a:t>
+              <a:t>Sort by Difficulty, Easiest First</a:t>
             </a:r>
           </a:p>
         </p:txBody>
@@ -9898,13 +9898,13 @@
           <a:p>
             <a:r>
               <a:rPr sz="2800"/>
-              <a:t>The cheapest marked row = your first AI feature</a:t>
+              <a:t>The easiest marked row = your first AI feature</a:t>
             </a:r>
           </a:p>
           <a:p>
             <a:r>
               <a:rPr sz="2800"/>
-              <a:t>Rows 1–8: mostly free local models</a:t>
+              <a:t>Rows 1-8: mostly free local models</a:t>
             </a:r>
           </a:p>
         </p:txBody>
@@ -10542,13 +10542,7 @@
           <a:p>
             <a:r>
               <a:rPr sz="2800"/>
-              <a:t>Every lab · every </a:t>
-            </a:r>
-            <a:r>
-              <a:rPr sz="2800">
-                <a:latin typeface="Consolas"/>
-              </a:rPr>
-              <a:t>.http</a:t>
+              <a:t>Every lab</a:t>
             </a:r>
             <a:r>
               <a:rPr sz="2800"/>
